--- a/decks/day3/module-3-compaction.pptx
+++ b/decks/day3/module-3-compaction.pptx
@@ -13,9 +13,10 @@
     <p:sldId id="261" r:id="rId7"/>
     <p:sldId id="262" r:id="rId8"/>
     <p:sldId id="263" r:id="rId9"/>
+    <p:sldId id="264" r:id="rId10"/>
   </p:sldIdLst>
   <p:notesMasterIdLst>
-    <p:notesMasterId r:id="rId10"/>
+    <p:notesMasterId r:id="rId11"/>
   </p:notesMasterIdLst>
   <p:sldSz cx="9144000" cy="5143500"/>
   <p:notesSz cx="5143500" cy="9144000"/>
@@ -954,8 +955,8 @@
           <a:p>
             <a:r>
               <a:rPr lang="en-US" dirty="0"/>
-              <a:t>• Explain ordered degradation. TokenBudgetComposedStrategy runs children in order, can stop once the budget is met, and falls back to oldest-first exclusion when needed.
-• GROUNDING SOURCE: https://learn.microsoft.com/en-us/agent-framework/concepts/agents/conversations/compaction?tabs=python</a:t>
+              <a:t>• Placeholder marker slide — the runbook has full narration, setup, and fallback plan. Runs compaction/basics.py as-is, no API key needed.
+• GROUNDING SOURCE: https://github.com/microsoft/agent-framework/blob/main/python/samples/02-agents/compaction/basics.py</a:t>
             </a:r>
             <a:endParaRPr lang="en-US" dirty="0"/>
           </a:p>
@@ -1043,7 +1044,7 @@
           <a:p>
             <a:r>
               <a:rPr lang="en-US" dirty="0"/>
-              <a:t>• Encourage an eval before adoption. Track token and latency improvements alongside task quality, tool selection, and retention of important facts.
+              <a:t>• Explain ordered degradation. TokenBudgetComposedStrategy runs children in order, can stop once the budget is met, and falls back to oldest-first exclusion when needed.
 • GROUNDING SOURCE: https://learn.microsoft.com/en-us/agent-framework/concepts/agents/conversations/compaction?tabs=python</a:t>
             </a:r>
             <a:endParaRPr lang="en-US" dirty="0"/>
@@ -1132,7 +1133,7 @@
           <a:p>
             <a:r>
               <a:rPr lang="en-US" dirty="0"/>
-              <a:t>• End with a clear non-requirement. The future Day 3 lab can succeed without compaction. Learners should adopt it only when they own in-memory history and have measurements.
+              <a:t>• Encourage an eval before adoption. Track token and latency improvements alongside task quality, tool selection, and retention of important facts.
 • GROUNDING SOURCE: https://learn.microsoft.com/en-us/agent-framework/concepts/agents/conversations/compaction?tabs=python</a:t>
             </a:r>
             <a:endParaRPr lang="en-US" dirty="0"/>
@@ -1157,6 +1158,95 @@
             <a:fld id="{F7021451-1387-4CA6-816F-3879F97B5CBC}" type="slidenum">
               <a:rPr lang="en-US"/>
               <a:t>8</a:t>
+            </a:fld>
+            <a:endParaRPr lang="en-US"/>
+          </a:p>
+        </p:txBody>
+      </p:sp>
+    </p:spTree>
+    <p:extLst>
+      <p:ext uri="{BB962C8B-B14F-4D97-AF65-F5344CB8AC3E}">
+        <p14:creationId xmlns:p14="http://schemas.microsoft.com/office/powerpoint/2010/main" val="1024086991"/>
+      </p:ext>
+    </p:extLst>
+  </p:cSld>
+  <p:clrMapOvr>
+    <a:masterClrMapping/>
+  </p:clrMapOvr>
+</p:notes>
+</file>
+
+<file path=ppt/notesSlides/notesSlide9.xml><?xml version="1.0" encoding="utf-8"?>
+<p:notes xmlns:a="http://schemas.openxmlformats.org/drawingml/2006/main" xmlns:r="http://schemas.openxmlformats.org/officeDocument/2006/relationships" xmlns:p="http://schemas.openxmlformats.org/presentationml/2006/main">
+  <p:cSld>
+    <p:spTree>
+      <p:nvGrpSpPr>
+        <p:cNvPr id="1" name=""/>
+        <p:cNvGrpSpPr/>
+        <p:nvPr/>
+      </p:nvGrpSpPr>
+      <p:grpSpPr>
+        <a:xfrm>
+          <a:off x="0" y="0"/>
+          <a:ext cx="0" cy="0"/>
+          <a:chOff x="0" y="0"/>
+          <a:chExt cx="0" cy="0"/>
+        </a:xfrm>
+      </p:grpSpPr>
+      <p:sp>
+        <p:nvSpPr>
+          <p:cNvPr id="2" name="Slide Image Placeholder 1"/>
+          <p:cNvSpPr>
+            <a:spLocks noGrp="1" noRot="1" noChangeAspect="1"/>
+          </p:cNvSpPr>
+          <p:nvPr>
+            <p:ph type="sldImg"/>
+          </p:nvPr>
+        </p:nvSpPr>
+        <p:spPr/>
+      </p:sp>
+      <p:sp>
+        <p:nvSpPr>
+          <p:cNvPr id="3" name="Notes Placeholder 2"/>
+          <p:cNvSpPr>
+            <a:spLocks noGrp="1"/>
+          </p:cNvSpPr>
+          <p:nvPr>
+            <p:ph type="body" idx="1"/>
+          </p:nvPr>
+        </p:nvSpPr>
+        <p:spPr/>
+        <p:txBody>
+          <a:bodyPr/>
+          <a:lstStyle/>
+          <a:p>
+            <a:r>
+              <a:rPr lang="en-US" dirty="0"/>
+              <a:t>• End with a clear non-requirement. The future Day 3 lab can succeed without compaction. Learners should adopt it only when they own in-memory history and have measurements.
+• GROUNDING SOURCE: https://learn.microsoft.com/en-us/agent-framework/concepts/agents/conversations/compaction?tabs=python</a:t>
+            </a:r>
+            <a:endParaRPr lang="en-US" dirty="0"/>
+          </a:p>
+        </p:txBody>
+      </p:sp>
+      <p:sp>
+        <p:nvSpPr>
+          <p:cNvPr id="4" name="Slide Number Placeholder 3"/>
+          <p:cNvSpPr>
+            <a:spLocks noGrp="1"/>
+          </p:cNvSpPr>
+          <p:nvPr>
+            <p:ph type="sldNum" sz="quarter" idx="10"/>
+          </p:nvPr>
+        </p:nvSpPr>
+        <p:spPr/>
+        <p:txBody>
+          <a:bodyPr/>
+          <a:lstStyle/>
+          <a:p>
+            <a:fld id="{F7021451-1387-4CA6-816F-3879F97B5CBC}" type="slidenum">
+              <a:rPr lang="en-US"/>
+              <a:t>9</a:t>
             </a:fld>
             <a:endParaRPr lang="en-US"/>
           </a:p>
@@ -3874,7 +3964,7 @@
     <p:bg>
       <p:bgPr>
         <a:solidFill>
-          <a:srgbClr val="FFFFFF"/>
+          <a:srgbClr val="CADCFC"/>
         </a:solidFill>
       </p:bgPr>
     </p:bg>
@@ -3901,7 +3991,7 @@
         <p:spPr>
           <a:xfrm>
             <a:off x="0" y="0"/>
-            <a:ext cx="54864" cy="5143500"/>
+            <a:ext cx="146304" cy="5143500"/>
           </a:xfrm>
           <a:prstGeom prst="rect">
             <a:avLst/>
@@ -3920,26 +4010,24 @@
         </p:nvSpPr>
         <p:spPr>
           <a:xfrm>
-            <a:off x="5486400" y="256032"/>
-            <a:ext cx="3337560" cy="228600"/>
-          </a:xfrm>
-          <a:prstGeom prst="rect">
-            <a:avLst/>
-          </a:prstGeom>
-          <a:noFill/>
-          <a:ln/>
-        </p:spPr>
-        <p:txBody>
-          <a:bodyPr wrap="square" lIns="0" tIns="0" rIns="0" bIns="0" rtlCol="0" anchor="ctr">
-            <a:normAutofit/>
-          </a:bodyPr>
+            <a:off x="5669280" y="274320"/>
+            <a:ext cx="3291840" cy="274320"/>
+          </a:xfrm>
+          <a:prstGeom prst="rect">
+            <a:avLst/>
+          </a:prstGeom>
+          <a:noFill/>
+          <a:ln/>
+        </p:spPr>
+        <p:txBody>
+          <a:bodyPr wrap="square" lIns="0" tIns="0" rIns="0" bIns="0" rtlCol="0" anchor="ctr"/>
           <a:lstStyle/>
           <a:p>
             <a:pPr algn="r" indent="0" marL="0">
               <a:buNone/>
             </a:pPr>
             <a:r>
-              <a:rPr lang="en-US" sz="950" dirty="0">
+              <a:rPr lang="en-US" sz="1000" dirty="0">
                 <a:solidFill>
                   <a:srgbClr val="6B7280"/>
                 </a:solidFill>
@@ -3947,9 +4035,9 @@
                 <a:ea typeface="Calibri" pitchFamily="34" charset="-122"/>
                 <a:cs typeface="Calibri" pitchFamily="34" charset="-120"/>
               </a:rPr>
-              <a:t>Day 3 · Module 3 · EXPERIMENTAL</a:t>
-            </a:r>
-            <a:endParaRPr lang="en-US" sz="950" dirty="0"/>
+              <a:t>Day 3 · Module 3 · EXPERIMENTAL · Demo</a:t>
+            </a:r>
+            <a:endParaRPr lang="en-US" sz="1000" dirty="0"/>
           </a:p>
         </p:txBody>
       </p:sp>
@@ -3961,26 +4049,24 @@
         </p:nvSpPr>
         <p:spPr>
           <a:xfrm>
-            <a:off x="365760" y="310896"/>
-            <a:ext cx="6583680" cy="603504"/>
-          </a:xfrm>
-          <a:prstGeom prst="rect">
-            <a:avLst/>
-          </a:prstGeom>
-          <a:noFill/>
-          <a:ln/>
-        </p:spPr>
-        <p:txBody>
-          <a:bodyPr wrap="square" lIns="0" tIns="0" rIns="0" bIns="0" rtlCol="0" anchor="ctr">
-            <a:normAutofit/>
-          </a:bodyPr>
+            <a:off x="548640" y="1051560"/>
+            <a:ext cx="5486400" cy="502920"/>
+          </a:xfrm>
+          <a:prstGeom prst="rect">
+            <a:avLst/>
+          </a:prstGeom>
+          <a:noFill/>
+          <a:ln/>
+        </p:spPr>
+        <p:txBody>
+          <a:bodyPr wrap="square" lIns="0" tIns="0" rIns="0" bIns="0" rtlCol="0" anchor="ctr"/>
           <a:lstStyle/>
           <a:p>
             <a:pPr indent="0" marL="0">
               <a:buNone/>
             </a:pPr>
             <a:r>
-              <a:rPr lang="en-US" sz="2800" b="1" dirty="0">
+              <a:rPr lang="en-US" sz="3200" b="1" spc="800" kern="0" dirty="0">
                 <a:solidFill>
                   <a:srgbClr val="1E2761"/>
                 </a:solidFill>
@@ -3988,38 +4074,50 @@
                 <a:ea typeface="Calibri" pitchFamily="34" charset="-122"/>
                 <a:cs typeface="Calibri" pitchFamily="34" charset="-120"/>
               </a:rPr>
-              <a:t>Compose by token budget</a:t>
-            </a:r>
-            <a:endParaRPr lang="en-US" sz="2800" dirty="0"/>
-          </a:p>
-        </p:txBody>
-      </p:sp>
-      <p:sp>
-        <p:nvSpPr>
-          <p:cNvPr id="5" name="Shape 3"/>
-          <p:cNvSpPr/>
-          <p:nvPr/>
-        </p:nvSpPr>
-        <p:spPr>
-          <a:xfrm>
-            <a:off x="365760" y="1078992"/>
-            <a:ext cx="4105656" cy="1655064"/>
-          </a:xfrm>
-          <a:prstGeom prst="roundRect">
-            <a:avLst>
-              <a:gd name="adj" fmla="val 3315"/>
-            </a:avLst>
-          </a:prstGeom>
-          <a:solidFill>
-            <a:srgbClr val="CADCFC"/>
-          </a:solidFill>
-          <a:ln w="10160">
-            <a:solidFill>
-              <a:srgbClr val="1E2761"/>
-            </a:solidFill>
-            <a:prstDash val="solid"/>
-          </a:ln>
-        </p:spPr>
+              <a:t>DEMO</a:t>
+            </a:r>
+            <a:endParaRPr lang="en-US" sz="3200" dirty="0"/>
+          </a:p>
+        </p:txBody>
+      </p:sp>
+      <p:sp>
+        <p:nvSpPr>
+          <p:cNvPr id="5" name="Text 3"/>
+          <p:cNvSpPr/>
+          <p:nvPr/>
+        </p:nvSpPr>
+        <p:spPr>
+          <a:xfrm>
+            <a:off x="548640" y="1691640"/>
+            <a:ext cx="8046720" cy="914400"/>
+          </a:xfrm>
+          <a:prstGeom prst="rect">
+            <a:avLst/>
+          </a:prstGeom>
+          <a:noFill/>
+          <a:ln/>
+        </p:spPr>
+        <p:txBody>
+          <a:bodyPr wrap="square" lIns="0" tIns="0" rIns="0" bIns="0" rtlCol="0" anchor="ctr"/>
+          <a:lstStyle/>
+          <a:p>
+            <a:pPr indent="0" marL="0">
+              <a:buNone/>
+            </a:pPr>
+            <a:r>
+              <a:rPr lang="en-US" sz="3000" b="1" dirty="0">
+                <a:solidFill>
+                  <a:srgbClr val="1E2761"/>
+                </a:solidFill>
+                <a:latin typeface="Calibri" pitchFamily="34" charset="0"/>
+                <a:ea typeface="Calibri" pitchFamily="34" charset="-122"/>
+                <a:cs typeface="Calibri" pitchFamily="34" charset="-120"/>
+              </a:rPr>
+              <a:t>SlidingWindowStrategy pruning old messages, live</a:t>
+            </a:r>
+            <a:endParaRPr lang="en-US" sz="3000" dirty="0"/>
+          </a:p>
+        </p:txBody>
       </p:sp>
       <p:sp>
         <p:nvSpPr>
@@ -4029,410 +4127,121 @@
         </p:nvSpPr>
         <p:spPr>
           <a:xfrm>
-            <a:off x="512064" y="1197864"/>
-            <a:ext cx="3813048" cy="310896"/>
-          </a:xfrm>
-          <a:prstGeom prst="rect">
-            <a:avLst/>
-          </a:prstGeom>
-          <a:noFill/>
-          <a:ln/>
-        </p:spPr>
-        <p:txBody>
-          <a:bodyPr wrap="square" lIns="0" tIns="0" rIns="0" bIns="0" rtlCol="0" anchor="ctr">
-            <a:normAutofit/>
-          </a:bodyPr>
+            <a:off x="6583680" y="1051560"/>
+            <a:ext cx="2194560" cy="502920"/>
+          </a:xfrm>
+          <a:prstGeom prst="rect">
+            <a:avLst/>
+          </a:prstGeom>
+          <a:noFill/>
+          <a:ln/>
+        </p:spPr>
+        <p:txBody>
+          <a:bodyPr wrap="square" lIns="0" tIns="0" rIns="0" bIns="0" rtlCol="0" anchor="ctr"/>
+          <a:lstStyle/>
+          <a:p>
+            <a:pPr algn="r" indent="0" marL="0">
+              <a:buNone/>
+            </a:pPr>
+            <a:r>
+              <a:rPr lang="en-US" sz="1800" i="1" dirty="0">
+                <a:solidFill>
+                  <a:srgbClr val="6B7280"/>
+                </a:solidFill>
+                <a:latin typeface="Calibri" pitchFamily="34" charset="0"/>
+                <a:ea typeface="Calibri" pitchFamily="34" charset="-122"/>
+                <a:cs typeface="Calibri" pitchFamily="34" charset="-120"/>
+              </a:rPr>
+              <a:t>~4 min</a:t>
+            </a:r>
+            <a:endParaRPr lang="en-US" sz="1800" dirty="0"/>
+          </a:p>
+        </p:txBody>
+      </p:sp>
+      <p:sp>
+        <p:nvSpPr>
+          <p:cNvPr id="7" name="Text 5"/>
+          <p:cNvSpPr/>
+          <p:nvPr/>
+        </p:nvSpPr>
+        <p:spPr>
+          <a:xfrm>
+            <a:off x="548640" y="2788920"/>
+            <a:ext cx="8046720" cy="1371600"/>
+          </a:xfrm>
+          <a:prstGeom prst="rect">
+            <a:avLst/>
+          </a:prstGeom>
+          <a:noFill/>
+          <a:ln/>
+        </p:spPr>
+        <p:txBody>
+          <a:bodyPr wrap="square" lIns="0" tIns="0" rIns="0" bIns="0" rtlCol="0" anchor="ctr"/>
           <a:lstStyle/>
           <a:p>
             <a:pPr indent="0" marL="0">
-              <a:buNone/>
-            </a:pPr>
-            <a:r>
-              <a:rPr lang="en-US" sz="1500" b="1" dirty="0">
-                <a:solidFill>
-                  <a:srgbClr val="1E2761"/>
-                </a:solidFill>
-                <a:latin typeface="Calibri" pitchFamily="34" charset="0"/>
-                <a:ea typeface="Calibri" pitchFamily="34" charset="-122"/>
-                <a:cs typeface="Calibri" pitchFamily="34" charset="-120"/>
-              </a:rPr>
-              <a:t>Collapse</a:t>
-            </a:r>
-            <a:endParaRPr lang="en-US" sz="1500" dirty="0"/>
-          </a:p>
-        </p:txBody>
-      </p:sp>
-      <p:sp>
-        <p:nvSpPr>
-          <p:cNvPr id="7" name="Text 5"/>
-          <p:cNvSpPr/>
-          <p:nvPr/>
-        </p:nvSpPr>
-        <p:spPr>
-          <a:xfrm>
-            <a:off x="512064" y="1581912"/>
-            <a:ext cx="3813048" cy="1033272"/>
-          </a:xfrm>
-          <a:prstGeom prst="rect">
-            <a:avLst/>
-          </a:prstGeom>
-          <a:noFill/>
-          <a:ln/>
-        </p:spPr>
-        <p:txBody>
-          <a:bodyPr wrap="square" lIns="0" tIns="0" rIns="0" bIns="0" rtlCol="0" anchor="t">
-            <a:normAutofit/>
-          </a:bodyPr>
+              <a:spcAft>
+                <a:spcPts val="600"/>
+              </a:spcAft>
+              <a:buNone/>
+            </a:pPr>
+            <a:r>
+              <a:rPr lang="en-US" sz="1600" dirty="0">
+                <a:solidFill>
+                  <a:srgbClr val="212121"/>
+                </a:solidFill>
+                <a:latin typeface="Calibri" pitchFamily="34" charset="0"/>
+                <a:ea typeface="Calibri" pitchFamily="34" charset="-122"/>
+                <a:cs typeface="Calibri" pitchFamily="34" charset="-120"/>
+              </a:rPr>
+              <a:t>Build a long local message list, print the group count, apply the previous slide's exact SlidingWindowStrategy(keep_last_groups=20), and print the group count again — the EXPERIMENTAL ladder's gentlest rung, proven on real data with no model call required.</a:t>
+            </a:r>
+            <a:endParaRPr lang="en-US" sz="1600" dirty="0"/>
+          </a:p>
+        </p:txBody>
+      </p:sp>
+      <p:sp>
+        <p:nvSpPr>
+          <p:cNvPr id="8" name="Text 6"/>
+          <p:cNvSpPr/>
+          <p:nvPr/>
+        </p:nvSpPr>
+        <p:spPr>
+          <a:xfrm>
+            <a:off x="548640" y="4434840"/>
+            <a:ext cx="8046720" cy="320040"/>
+          </a:xfrm>
+          <a:prstGeom prst="rect">
+            <a:avLst/>
+          </a:prstGeom>
+          <a:noFill/>
+          <a:ln/>
+        </p:spPr>
+        <p:txBody>
+          <a:bodyPr wrap="square" lIns="0" tIns="0" rIns="0" bIns="0" rtlCol="0" anchor="ctr"/>
           <a:lstStyle/>
           <a:p>
             <a:pPr indent="0" marL="0">
               <a:buNone/>
             </a:pPr>
             <a:r>
-              <a:rPr lang="en-US" sz="1150" dirty="0">
-                <a:solidFill>
-                  <a:srgbClr val="212121"/>
-                </a:solidFill>
-                <a:latin typeface="Calibri" pitchFamily="34" charset="0"/>
-                <a:ea typeface="Calibri" pitchFamily="34" charset="-122"/>
-                <a:cs typeface="Calibri" pitchFamily="34" charset="-120"/>
-              </a:rPr>
-              <a:t>Reclaim verbose tool-result space</a:t>
-            </a:r>
-            <a:endParaRPr lang="en-US" sz="1150" dirty="0"/>
-          </a:p>
-        </p:txBody>
-      </p:sp>
-      <p:sp>
-        <p:nvSpPr>
-          <p:cNvPr id="8" name="Shape 6"/>
-          <p:cNvSpPr/>
-          <p:nvPr/>
-        </p:nvSpPr>
-        <p:spPr>
-          <a:xfrm>
-            <a:off x="4672584" y="1078992"/>
-            <a:ext cx="4105656" cy="1655064"/>
-          </a:xfrm>
-          <a:prstGeom prst="roundRect">
-            <a:avLst>
-              <a:gd name="adj" fmla="val 3315"/>
-            </a:avLst>
-          </a:prstGeom>
-          <a:solidFill>
-            <a:srgbClr val="F3F4F6"/>
-          </a:solidFill>
-          <a:ln w="10160">
-            <a:solidFill>
-              <a:srgbClr val="D1D5DB"/>
-            </a:solidFill>
-            <a:prstDash val="solid"/>
-          </a:ln>
-        </p:spPr>
-      </p:sp>
-      <p:sp>
-        <p:nvSpPr>
-          <p:cNvPr id="9" name="Text 7"/>
-          <p:cNvSpPr/>
-          <p:nvPr/>
-        </p:nvSpPr>
-        <p:spPr>
-          <a:xfrm>
-            <a:off x="4818888" y="1197864"/>
-            <a:ext cx="3813048" cy="310896"/>
-          </a:xfrm>
-          <a:prstGeom prst="rect">
-            <a:avLst/>
-          </a:prstGeom>
-          <a:noFill/>
-          <a:ln/>
-        </p:spPr>
-        <p:txBody>
-          <a:bodyPr wrap="square" lIns="0" tIns="0" rIns="0" bIns="0" rtlCol="0" anchor="ctr">
-            <a:normAutofit/>
-          </a:bodyPr>
-          <a:lstStyle/>
-          <a:p>
-            <a:pPr indent="0" marL="0">
-              <a:buNone/>
-            </a:pPr>
-            <a:r>
-              <a:rPr lang="en-US" sz="1500" b="1" dirty="0">
-                <a:solidFill>
-                  <a:srgbClr val="1E2761"/>
-                </a:solidFill>
-                <a:latin typeface="Calibri" pitchFamily="34" charset="0"/>
-                <a:ea typeface="Calibri" pitchFamily="34" charset="-122"/>
-                <a:cs typeface="Calibri" pitchFamily="34" charset="-120"/>
-              </a:rPr>
-              <a:t>Summarize</a:t>
-            </a:r>
-            <a:endParaRPr lang="en-US" sz="1500" dirty="0"/>
-          </a:p>
-        </p:txBody>
-      </p:sp>
-      <p:sp>
-        <p:nvSpPr>
-          <p:cNvPr id="10" name="Text 8"/>
-          <p:cNvSpPr/>
-          <p:nvPr/>
-        </p:nvSpPr>
-        <p:spPr>
-          <a:xfrm>
-            <a:off x="4818888" y="1581912"/>
-            <a:ext cx="3813048" cy="1033272"/>
-          </a:xfrm>
-          <a:prstGeom prst="rect">
-            <a:avLst/>
-          </a:prstGeom>
-          <a:noFill/>
-          <a:ln/>
-        </p:spPr>
-        <p:txBody>
-          <a:bodyPr wrap="square" lIns="0" tIns="0" rIns="0" bIns="0" rtlCol="0" anchor="t">
-            <a:normAutofit/>
-          </a:bodyPr>
-          <a:lstStyle/>
-          <a:p>
-            <a:pPr indent="0" marL="0">
-              <a:buNone/>
-            </a:pPr>
-            <a:r>
-              <a:rPr lang="en-US" sz="1150" dirty="0">
-                <a:solidFill>
-                  <a:srgbClr val="212121"/>
-                </a:solidFill>
-                <a:latin typeface="Calibri" pitchFamily="34" charset="0"/>
-                <a:ea typeface="Calibri" pitchFamily="34" charset="-122"/>
-                <a:cs typeface="Calibri" pitchFamily="34" charset="-120"/>
-              </a:rPr>
-              <a:t>Preserve decisions with an extra model call</a:t>
-            </a:r>
-            <a:endParaRPr lang="en-US" sz="1150" dirty="0"/>
-          </a:p>
-        </p:txBody>
-      </p:sp>
-      <p:sp>
-        <p:nvSpPr>
-          <p:cNvPr id="11" name="Shape 9"/>
-          <p:cNvSpPr/>
-          <p:nvPr/>
-        </p:nvSpPr>
-        <p:spPr>
-          <a:xfrm>
-            <a:off x="365760" y="2935224"/>
-            <a:ext cx="4105656" cy="1655064"/>
-          </a:xfrm>
-          <a:prstGeom prst="roundRect">
-            <a:avLst>
-              <a:gd name="adj" fmla="val 3315"/>
-            </a:avLst>
-          </a:prstGeom>
-          <a:solidFill>
-            <a:srgbClr val="F3F4F6"/>
-          </a:solidFill>
-          <a:ln w="10160">
-            <a:solidFill>
-              <a:srgbClr val="D1D5DB"/>
-            </a:solidFill>
-            <a:prstDash val="solid"/>
-          </a:ln>
-        </p:spPr>
-      </p:sp>
-      <p:sp>
-        <p:nvSpPr>
-          <p:cNvPr id="12" name="Text 10"/>
-          <p:cNvSpPr/>
-          <p:nvPr/>
-        </p:nvSpPr>
-        <p:spPr>
-          <a:xfrm>
-            <a:off x="512064" y="3054096"/>
-            <a:ext cx="3813048" cy="310896"/>
-          </a:xfrm>
-          <a:prstGeom prst="rect">
-            <a:avLst/>
-          </a:prstGeom>
-          <a:noFill/>
-          <a:ln/>
-        </p:spPr>
-        <p:txBody>
-          <a:bodyPr wrap="square" lIns="0" tIns="0" rIns="0" bIns="0" rtlCol="0" anchor="ctr">
-            <a:normAutofit/>
-          </a:bodyPr>
-          <a:lstStyle/>
-          <a:p>
-            <a:pPr indent="0" marL="0">
-              <a:buNone/>
-            </a:pPr>
-            <a:r>
-              <a:rPr lang="en-US" sz="1500" b="1" dirty="0">
-                <a:solidFill>
-                  <a:srgbClr val="1E2761"/>
-                </a:solidFill>
-                <a:latin typeface="Calibri" pitchFamily="34" charset="0"/>
-                <a:ea typeface="Calibri" pitchFamily="34" charset="-122"/>
-                <a:cs typeface="Calibri" pitchFamily="34" charset="-120"/>
-              </a:rPr>
-              <a:t>Window</a:t>
-            </a:r>
-            <a:endParaRPr lang="en-US" sz="1500" dirty="0"/>
-          </a:p>
-        </p:txBody>
-      </p:sp>
-      <p:sp>
-        <p:nvSpPr>
-          <p:cNvPr id="13" name="Text 11"/>
-          <p:cNvSpPr/>
-          <p:nvPr/>
-        </p:nvSpPr>
-        <p:spPr>
-          <a:xfrm>
-            <a:off x="512064" y="3438144"/>
-            <a:ext cx="3813048" cy="1033272"/>
-          </a:xfrm>
-          <a:prstGeom prst="rect">
-            <a:avLst/>
-          </a:prstGeom>
-          <a:noFill/>
-          <a:ln/>
-        </p:spPr>
-        <p:txBody>
-          <a:bodyPr wrap="square" lIns="0" tIns="0" rIns="0" bIns="0" rtlCol="0" anchor="t">
-            <a:normAutofit/>
-          </a:bodyPr>
-          <a:lstStyle/>
-          <a:p>
-            <a:pPr indent="0" marL="0">
-              <a:buNone/>
-            </a:pPr>
-            <a:r>
-              <a:rPr lang="en-US" sz="1150" dirty="0">
-                <a:solidFill>
-                  <a:srgbClr val="212121"/>
-                </a:solidFill>
-                <a:latin typeface="Calibri" pitchFamily="34" charset="0"/>
-                <a:ea typeface="Calibri" pitchFamily="34" charset="-122"/>
-                <a:cs typeface="Calibri" pitchFamily="34" charset="-120"/>
-              </a:rPr>
-              <a:t>Keep the most recent groups</a:t>
-            </a:r>
-            <a:endParaRPr lang="en-US" sz="1150" dirty="0"/>
-          </a:p>
-        </p:txBody>
-      </p:sp>
-      <p:sp>
-        <p:nvSpPr>
-          <p:cNvPr id="14" name="Shape 12"/>
-          <p:cNvSpPr/>
-          <p:nvPr/>
-        </p:nvSpPr>
-        <p:spPr>
-          <a:xfrm>
-            <a:off x="4672584" y="2935224"/>
-            <a:ext cx="4105656" cy="1655064"/>
-          </a:xfrm>
-          <a:prstGeom prst="roundRect">
-            <a:avLst>
-              <a:gd name="adj" fmla="val 3315"/>
-            </a:avLst>
-          </a:prstGeom>
-          <a:solidFill>
-            <a:srgbClr val="F3F4F6"/>
-          </a:solidFill>
-          <a:ln w="10160">
-            <a:solidFill>
-              <a:srgbClr val="D1D5DB"/>
-            </a:solidFill>
-            <a:prstDash val="solid"/>
-          </a:ln>
-        </p:spPr>
-      </p:sp>
-      <p:sp>
-        <p:nvSpPr>
-          <p:cNvPr id="15" name="Text 13"/>
-          <p:cNvSpPr/>
-          <p:nvPr/>
-        </p:nvSpPr>
-        <p:spPr>
-          <a:xfrm>
-            <a:off x="4818888" y="3054096"/>
-            <a:ext cx="3813048" cy="310896"/>
-          </a:xfrm>
-          <a:prstGeom prst="rect">
-            <a:avLst/>
-          </a:prstGeom>
-          <a:noFill/>
-          <a:ln/>
-        </p:spPr>
-        <p:txBody>
-          <a:bodyPr wrap="square" lIns="0" tIns="0" rIns="0" bIns="0" rtlCol="0" anchor="ctr">
-            <a:normAutofit/>
-          </a:bodyPr>
-          <a:lstStyle/>
-          <a:p>
-            <a:pPr indent="0" marL="0">
-              <a:buNone/>
-            </a:pPr>
-            <a:r>
-              <a:rPr lang="en-US" sz="1500" b="1" dirty="0">
-                <a:solidFill>
-                  <a:srgbClr val="1E2761"/>
-                </a:solidFill>
-                <a:latin typeface="Calibri" pitchFamily="34" charset="0"/>
-                <a:ea typeface="Calibri" pitchFamily="34" charset="-122"/>
-                <a:cs typeface="Calibri" pitchFamily="34" charset="-120"/>
-              </a:rPr>
-              <a:t>Fallback</a:t>
-            </a:r>
-            <a:endParaRPr lang="en-US" sz="1500" dirty="0"/>
-          </a:p>
-        </p:txBody>
-      </p:sp>
-      <p:sp>
-        <p:nvSpPr>
-          <p:cNvPr id="16" name="Text 14"/>
-          <p:cNvSpPr/>
-          <p:nvPr/>
-        </p:nvSpPr>
-        <p:spPr>
-          <a:xfrm>
-            <a:off x="4818888" y="3438144"/>
-            <a:ext cx="3813048" cy="1033272"/>
-          </a:xfrm>
-          <a:prstGeom prst="rect">
-            <a:avLst/>
-          </a:prstGeom>
-          <a:noFill/>
-          <a:ln/>
-        </p:spPr>
-        <p:txBody>
-          <a:bodyPr wrap="square" lIns="0" tIns="0" rIns="0" bIns="0" rtlCol="0" anchor="t">
-            <a:normAutofit/>
-          </a:bodyPr>
-          <a:lstStyle/>
-          <a:p>
-            <a:pPr indent="0" marL="0">
-              <a:buNone/>
-            </a:pPr>
-            <a:r>
-              <a:rPr lang="en-US" sz="1150" dirty="0">
-                <a:solidFill>
-                  <a:srgbClr val="212121"/>
-                </a:solidFill>
-                <a:latin typeface="Calibri" pitchFamily="34" charset="0"/>
-                <a:ea typeface="Calibri" pitchFamily="34" charset="-122"/>
-                <a:cs typeface="Calibri" pitchFamily="34" charset="-120"/>
-              </a:rPr>
-              <a:t>Exclude oldest groups until the token target is met</a:t>
-            </a:r>
-            <a:endParaRPr lang="en-US" sz="1150" dirty="0"/>
-          </a:p>
-        </p:txBody>
-      </p:sp>
-      <p:sp>
-        <p:nvSpPr>
-          <p:cNvPr id="17" name="Shape 15"/>
+              <a:rPr lang="en-US" sz="1100" i="1" dirty="0">
+                <a:solidFill>
+                  <a:srgbClr val="6B7280"/>
+                </a:solidFill>
+                <a:latin typeface="Calibri" pitchFamily="34" charset="0"/>
+                <a:ea typeface="Calibri" pitchFamily="34" charset="-122"/>
+                <a:cs typeface="Calibri" pitchFamily="34" charset="-120"/>
+              </a:rPr>
+              <a:t>Runbook: demos/day3/module-3-demo-1-sliding-window.md</a:t>
+            </a:r>
+            <a:endParaRPr lang="en-US" sz="1100" dirty="0"/>
+          </a:p>
+        </p:txBody>
+      </p:sp>
+      <p:sp>
+        <p:nvSpPr>
+          <p:cNvPr id="9" name="Shape 7"/>
           <p:cNvSpPr/>
           <p:nvPr/>
         </p:nvSpPr>
@@ -4455,7 +4264,7 @@
       </p:sp>
       <p:sp>
         <p:nvSpPr>
-          <p:cNvPr id="18" name="Text 16"/>
+          <p:cNvPr id="10" name="Text 8"/>
           <p:cNvSpPr/>
           <p:nvPr/>
         </p:nvSpPr>
@@ -4488,7 +4297,7 @@
                 <a:ea typeface="Calibri" pitchFamily="34" charset="-122"/>
                 <a:cs typeface="Calibri" pitchFamily="34" charset="-120"/>
               </a:rPr>
-              <a:t>Source: https://learn.microsoft.com/en-us/agent-framework/concepts/agents/conversations/compaction?tabs=python</a:t>
+              <a:t>Source: https://github.com/microsoft/agent-framework/blob/main/python/samples/02-agents/compaction/basics.py</a:t>
             </a:r>
             <a:endParaRPr lang="en-US" sz="820" dirty="0"/>
           </a:p>
@@ -4622,6 +4431,640 @@
                 <a:ea typeface="Calibri" pitchFamily="34" charset="-122"/>
                 <a:cs typeface="Calibri" pitchFamily="34" charset="-120"/>
               </a:rPr>
+              <a:t>Compose by token budget</a:t>
+            </a:r>
+            <a:endParaRPr lang="en-US" sz="2800" dirty="0"/>
+          </a:p>
+        </p:txBody>
+      </p:sp>
+      <p:sp>
+        <p:nvSpPr>
+          <p:cNvPr id="5" name="Shape 3"/>
+          <p:cNvSpPr/>
+          <p:nvPr/>
+        </p:nvSpPr>
+        <p:spPr>
+          <a:xfrm>
+            <a:off x="365760" y="1078992"/>
+            <a:ext cx="4105656" cy="1655064"/>
+          </a:xfrm>
+          <a:prstGeom prst="roundRect">
+            <a:avLst>
+              <a:gd name="adj" fmla="val 3315"/>
+            </a:avLst>
+          </a:prstGeom>
+          <a:solidFill>
+            <a:srgbClr val="CADCFC"/>
+          </a:solidFill>
+          <a:ln w="10160">
+            <a:solidFill>
+              <a:srgbClr val="1E2761"/>
+            </a:solidFill>
+            <a:prstDash val="solid"/>
+          </a:ln>
+        </p:spPr>
+      </p:sp>
+      <p:sp>
+        <p:nvSpPr>
+          <p:cNvPr id="6" name="Text 4"/>
+          <p:cNvSpPr/>
+          <p:nvPr/>
+        </p:nvSpPr>
+        <p:spPr>
+          <a:xfrm>
+            <a:off x="512064" y="1197864"/>
+            <a:ext cx="3813048" cy="310896"/>
+          </a:xfrm>
+          <a:prstGeom prst="rect">
+            <a:avLst/>
+          </a:prstGeom>
+          <a:noFill/>
+          <a:ln/>
+        </p:spPr>
+        <p:txBody>
+          <a:bodyPr wrap="square" lIns="0" tIns="0" rIns="0" bIns="0" rtlCol="0" anchor="ctr">
+            <a:normAutofit/>
+          </a:bodyPr>
+          <a:lstStyle/>
+          <a:p>
+            <a:pPr indent="0" marL="0">
+              <a:buNone/>
+            </a:pPr>
+            <a:r>
+              <a:rPr lang="en-US" sz="1500" b="1" dirty="0">
+                <a:solidFill>
+                  <a:srgbClr val="1E2761"/>
+                </a:solidFill>
+                <a:latin typeface="Calibri" pitchFamily="34" charset="0"/>
+                <a:ea typeface="Calibri" pitchFamily="34" charset="-122"/>
+                <a:cs typeface="Calibri" pitchFamily="34" charset="-120"/>
+              </a:rPr>
+              <a:t>Collapse</a:t>
+            </a:r>
+            <a:endParaRPr lang="en-US" sz="1500" dirty="0"/>
+          </a:p>
+        </p:txBody>
+      </p:sp>
+      <p:sp>
+        <p:nvSpPr>
+          <p:cNvPr id="7" name="Text 5"/>
+          <p:cNvSpPr/>
+          <p:nvPr/>
+        </p:nvSpPr>
+        <p:spPr>
+          <a:xfrm>
+            <a:off x="512064" y="1581912"/>
+            <a:ext cx="3813048" cy="1033272"/>
+          </a:xfrm>
+          <a:prstGeom prst="rect">
+            <a:avLst/>
+          </a:prstGeom>
+          <a:noFill/>
+          <a:ln/>
+        </p:spPr>
+        <p:txBody>
+          <a:bodyPr wrap="square" lIns="0" tIns="0" rIns="0" bIns="0" rtlCol="0" anchor="t">
+            <a:normAutofit/>
+          </a:bodyPr>
+          <a:lstStyle/>
+          <a:p>
+            <a:pPr indent="0" marL="0">
+              <a:buNone/>
+            </a:pPr>
+            <a:r>
+              <a:rPr lang="en-US" sz="1150" dirty="0">
+                <a:solidFill>
+                  <a:srgbClr val="212121"/>
+                </a:solidFill>
+                <a:latin typeface="Calibri" pitchFamily="34" charset="0"/>
+                <a:ea typeface="Calibri" pitchFamily="34" charset="-122"/>
+                <a:cs typeface="Calibri" pitchFamily="34" charset="-120"/>
+              </a:rPr>
+              <a:t>Reclaim verbose tool-result space</a:t>
+            </a:r>
+            <a:endParaRPr lang="en-US" sz="1150" dirty="0"/>
+          </a:p>
+        </p:txBody>
+      </p:sp>
+      <p:sp>
+        <p:nvSpPr>
+          <p:cNvPr id="8" name="Shape 6"/>
+          <p:cNvSpPr/>
+          <p:nvPr/>
+        </p:nvSpPr>
+        <p:spPr>
+          <a:xfrm>
+            <a:off x="4672584" y="1078992"/>
+            <a:ext cx="4105656" cy="1655064"/>
+          </a:xfrm>
+          <a:prstGeom prst="roundRect">
+            <a:avLst>
+              <a:gd name="adj" fmla="val 3315"/>
+            </a:avLst>
+          </a:prstGeom>
+          <a:solidFill>
+            <a:srgbClr val="F3F4F6"/>
+          </a:solidFill>
+          <a:ln w="10160">
+            <a:solidFill>
+              <a:srgbClr val="D1D5DB"/>
+            </a:solidFill>
+            <a:prstDash val="solid"/>
+          </a:ln>
+        </p:spPr>
+      </p:sp>
+      <p:sp>
+        <p:nvSpPr>
+          <p:cNvPr id="9" name="Text 7"/>
+          <p:cNvSpPr/>
+          <p:nvPr/>
+        </p:nvSpPr>
+        <p:spPr>
+          <a:xfrm>
+            <a:off x="4818888" y="1197864"/>
+            <a:ext cx="3813048" cy="310896"/>
+          </a:xfrm>
+          <a:prstGeom prst="rect">
+            <a:avLst/>
+          </a:prstGeom>
+          <a:noFill/>
+          <a:ln/>
+        </p:spPr>
+        <p:txBody>
+          <a:bodyPr wrap="square" lIns="0" tIns="0" rIns="0" bIns="0" rtlCol="0" anchor="ctr">
+            <a:normAutofit/>
+          </a:bodyPr>
+          <a:lstStyle/>
+          <a:p>
+            <a:pPr indent="0" marL="0">
+              <a:buNone/>
+            </a:pPr>
+            <a:r>
+              <a:rPr lang="en-US" sz="1500" b="1" dirty="0">
+                <a:solidFill>
+                  <a:srgbClr val="1E2761"/>
+                </a:solidFill>
+                <a:latin typeface="Calibri" pitchFamily="34" charset="0"/>
+                <a:ea typeface="Calibri" pitchFamily="34" charset="-122"/>
+                <a:cs typeface="Calibri" pitchFamily="34" charset="-120"/>
+              </a:rPr>
+              <a:t>Summarize</a:t>
+            </a:r>
+            <a:endParaRPr lang="en-US" sz="1500" dirty="0"/>
+          </a:p>
+        </p:txBody>
+      </p:sp>
+      <p:sp>
+        <p:nvSpPr>
+          <p:cNvPr id="10" name="Text 8"/>
+          <p:cNvSpPr/>
+          <p:nvPr/>
+        </p:nvSpPr>
+        <p:spPr>
+          <a:xfrm>
+            <a:off x="4818888" y="1581912"/>
+            <a:ext cx="3813048" cy="1033272"/>
+          </a:xfrm>
+          <a:prstGeom prst="rect">
+            <a:avLst/>
+          </a:prstGeom>
+          <a:noFill/>
+          <a:ln/>
+        </p:spPr>
+        <p:txBody>
+          <a:bodyPr wrap="square" lIns="0" tIns="0" rIns="0" bIns="0" rtlCol="0" anchor="t">
+            <a:normAutofit/>
+          </a:bodyPr>
+          <a:lstStyle/>
+          <a:p>
+            <a:pPr indent="0" marL="0">
+              <a:buNone/>
+            </a:pPr>
+            <a:r>
+              <a:rPr lang="en-US" sz="1150" dirty="0">
+                <a:solidFill>
+                  <a:srgbClr val="212121"/>
+                </a:solidFill>
+                <a:latin typeface="Calibri" pitchFamily="34" charset="0"/>
+                <a:ea typeface="Calibri" pitchFamily="34" charset="-122"/>
+                <a:cs typeface="Calibri" pitchFamily="34" charset="-120"/>
+              </a:rPr>
+              <a:t>Preserve decisions with an extra model call</a:t>
+            </a:r>
+            <a:endParaRPr lang="en-US" sz="1150" dirty="0"/>
+          </a:p>
+        </p:txBody>
+      </p:sp>
+      <p:sp>
+        <p:nvSpPr>
+          <p:cNvPr id="11" name="Shape 9"/>
+          <p:cNvSpPr/>
+          <p:nvPr/>
+        </p:nvSpPr>
+        <p:spPr>
+          <a:xfrm>
+            <a:off x="365760" y="2935224"/>
+            <a:ext cx="4105656" cy="1655064"/>
+          </a:xfrm>
+          <a:prstGeom prst="roundRect">
+            <a:avLst>
+              <a:gd name="adj" fmla="val 3315"/>
+            </a:avLst>
+          </a:prstGeom>
+          <a:solidFill>
+            <a:srgbClr val="F3F4F6"/>
+          </a:solidFill>
+          <a:ln w="10160">
+            <a:solidFill>
+              <a:srgbClr val="D1D5DB"/>
+            </a:solidFill>
+            <a:prstDash val="solid"/>
+          </a:ln>
+        </p:spPr>
+      </p:sp>
+      <p:sp>
+        <p:nvSpPr>
+          <p:cNvPr id="12" name="Text 10"/>
+          <p:cNvSpPr/>
+          <p:nvPr/>
+        </p:nvSpPr>
+        <p:spPr>
+          <a:xfrm>
+            <a:off x="512064" y="3054096"/>
+            <a:ext cx="3813048" cy="310896"/>
+          </a:xfrm>
+          <a:prstGeom prst="rect">
+            <a:avLst/>
+          </a:prstGeom>
+          <a:noFill/>
+          <a:ln/>
+        </p:spPr>
+        <p:txBody>
+          <a:bodyPr wrap="square" lIns="0" tIns="0" rIns="0" bIns="0" rtlCol="0" anchor="ctr">
+            <a:normAutofit/>
+          </a:bodyPr>
+          <a:lstStyle/>
+          <a:p>
+            <a:pPr indent="0" marL="0">
+              <a:buNone/>
+            </a:pPr>
+            <a:r>
+              <a:rPr lang="en-US" sz="1500" b="1" dirty="0">
+                <a:solidFill>
+                  <a:srgbClr val="1E2761"/>
+                </a:solidFill>
+                <a:latin typeface="Calibri" pitchFamily="34" charset="0"/>
+                <a:ea typeface="Calibri" pitchFamily="34" charset="-122"/>
+                <a:cs typeface="Calibri" pitchFamily="34" charset="-120"/>
+              </a:rPr>
+              <a:t>Window</a:t>
+            </a:r>
+            <a:endParaRPr lang="en-US" sz="1500" dirty="0"/>
+          </a:p>
+        </p:txBody>
+      </p:sp>
+      <p:sp>
+        <p:nvSpPr>
+          <p:cNvPr id="13" name="Text 11"/>
+          <p:cNvSpPr/>
+          <p:nvPr/>
+        </p:nvSpPr>
+        <p:spPr>
+          <a:xfrm>
+            <a:off x="512064" y="3438144"/>
+            <a:ext cx="3813048" cy="1033272"/>
+          </a:xfrm>
+          <a:prstGeom prst="rect">
+            <a:avLst/>
+          </a:prstGeom>
+          <a:noFill/>
+          <a:ln/>
+        </p:spPr>
+        <p:txBody>
+          <a:bodyPr wrap="square" lIns="0" tIns="0" rIns="0" bIns="0" rtlCol="0" anchor="t">
+            <a:normAutofit/>
+          </a:bodyPr>
+          <a:lstStyle/>
+          <a:p>
+            <a:pPr indent="0" marL="0">
+              <a:buNone/>
+            </a:pPr>
+            <a:r>
+              <a:rPr lang="en-US" sz="1150" dirty="0">
+                <a:solidFill>
+                  <a:srgbClr val="212121"/>
+                </a:solidFill>
+                <a:latin typeface="Calibri" pitchFamily="34" charset="0"/>
+                <a:ea typeface="Calibri" pitchFamily="34" charset="-122"/>
+                <a:cs typeface="Calibri" pitchFamily="34" charset="-120"/>
+              </a:rPr>
+              <a:t>Keep the most recent groups</a:t>
+            </a:r>
+            <a:endParaRPr lang="en-US" sz="1150" dirty="0"/>
+          </a:p>
+        </p:txBody>
+      </p:sp>
+      <p:sp>
+        <p:nvSpPr>
+          <p:cNvPr id="14" name="Shape 12"/>
+          <p:cNvSpPr/>
+          <p:nvPr/>
+        </p:nvSpPr>
+        <p:spPr>
+          <a:xfrm>
+            <a:off x="4672584" y="2935224"/>
+            <a:ext cx="4105656" cy="1655064"/>
+          </a:xfrm>
+          <a:prstGeom prst="roundRect">
+            <a:avLst>
+              <a:gd name="adj" fmla="val 3315"/>
+            </a:avLst>
+          </a:prstGeom>
+          <a:solidFill>
+            <a:srgbClr val="F3F4F6"/>
+          </a:solidFill>
+          <a:ln w="10160">
+            <a:solidFill>
+              <a:srgbClr val="D1D5DB"/>
+            </a:solidFill>
+            <a:prstDash val="solid"/>
+          </a:ln>
+        </p:spPr>
+      </p:sp>
+      <p:sp>
+        <p:nvSpPr>
+          <p:cNvPr id="15" name="Text 13"/>
+          <p:cNvSpPr/>
+          <p:nvPr/>
+        </p:nvSpPr>
+        <p:spPr>
+          <a:xfrm>
+            <a:off x="4818888" y="3054096"/>
+            <a:ext cx="3813048" cy="310896"/>
+          </a:xfrm>
+          <a:prstGeom prst="rect">
+            <a:avLst/>
+          </a:prstGeom>
+          <a:noFill/>
+          <a:ln/>
+        </p:spPr>
+        <p:txBody>
+          <a:bodyPr wrap="square" lIns="0" tIns="0" rIns="0" bIns="0" rtlCol="0" anchor="ctr">
+            <a:normAutofit/>
+          </a:bodyPr>
+          <a:lstStyle/>
+          <a:p>
+            <a:pPr indent="0" marL="0">
+              <a:buNone/>
+            </a:pPr>
+            <a:r>
+              <a:rPr lang="en-US" sz="1500" b="1" dirty="0">
+                <a:solidFill>
+                  <a:srgbClr val="1E2761"/>
+                </a:solidFill>
+                <a:latin typeface="Calibri" pitchFamily="34" charset="0"/>
+                <a:ea typeface="Calibri" pitchFamily="34" charset="-122"/>
+                <a:cs typeface="Calibri" pitchFamily="34" charset="-120"/>
+              </a:rPr>
+              <a:t>Fallback</a:t>
+            </a:r>
+            <a:endParaRPr lang="en-US" sz="1500" dirty="0"/>
+          </a:p>
+        </p:txBody>
+      </p:sp>
+      <p:sp>
+        <p:nvSpPr>
+          <p:cNvPr id="16" name="Text 14"/>
+          <p:cNvSpPr/>
+          <p:nvPr/>
+        </p:nvSpPr>
+        <p:spPr>
+          <a:xfrm>
+            <a:off x="4818888" y="3438144"/>
+            <a:ext cx="3813048" cy="1033272"/>
+          </a:xfrm>
+          <a:prstGeom prst="rect">
+            <a:avLst/>
+          </a:prstGeom>
+          <a:noFill/>
+          <a:ln/>
+        </p:spPr>
+        <p:txBody>
+          <a:bodyPr wrap="square" lIns="0" tIns="0" rIns="0" bIns="0" rtlCol="0" anchor="t">
+            <a:normAutofit/>
+          </a:bodyPr>
+          <a:lstStyle/>
+          <a:p>
+            <a:pPr indent="0" marL="0">
+              <a:buNone/>
+            </a:pPr>
+            <a:r>
+              <a:rPr lang="en-US" sz="1150" dirty="0">
+                <a:solidFill>
+                  <a:srgbClr val="212121"/>
+                </a:solidFill>
+                <a:latin typeface="Calibri" pitchFamily="34" charset="0"/>
+                <a:ea typeface="Calibri" pitchFamily="34" charset="-122"/>
+                <a:cs typeface="Calibri" pitchFamily="34" charset="-120"/>
+              </a:rPr>
+              <a:t>Exclude oldest groups until the token target is met</a:t>
+            </a:r>
+            <a:endParaRPr lang="en-US" sz="1150" dirty="0"/>
+          </a:p>
+        </p:txBody>
+      </p:sp>
+      <p:sp>
+        <p:nvSpPr>
+          <p:cNvPr id="17" name="Shape 15"/>
+          <p:cNvSpPr/>
+          <p:nvPr/>
+        </p:nvSpPr>
+        <p:spPr>
+          <a:xfrm>
+            <a:off x="365760" y="4773168"/>
+            <a:ext cx="8412480" cy="0"/>
+          </a:xfrm>
+          <a:prstGeom prst="line">
+            <a:avLst/>
+          </a:prstGeom>
+          <a:noFill/>
+          <a:ln w="6350">
+            <a:solidFill>
+              <a:srgbClr val="D1D5DB"/>
+            </a:solidFill>
+            <a:prstDash val="solid"/>
+          </a:ln>
+        </p:spPr>
+      </p:sp>
+      <p:sp>
+        <p:nvSpPr>
+          <p:cNvPr id="18" name="Text 16"/>
+          <p:cNvSpPr/>
+          <p:nvPr/>
+        </p:nvSpPr>
+        <p:spPr>
+          <a:xfrm>
+            <a:off x="384048" y="4818888"/>
+            <a:ext cx="8275320" cy="182880"/>
+          </a:xfrm>
+          <a:prstGeom prst="rect">
+            <a:avLst/>
+          </a:prstGeom>
+          <a:noFill/>
+          <a:ln/>
+        </p:spPr>
+        <p:txBody>
+          <a:bodyPr wrap="square" lIns="0" tIns="0" rIns="0" bIns="0" rtlCol="0" anchor="ctr">
+            <a:normAutofit/>
+          </a:bodyPr>
+          <a:lstStyle/>
+          <a:p>
+            <a:pPr indent="0" marL="0">
+              <a:buNone/>
+            </a:pPr>
+            <a:r>
+              <a:rPr lang="en-US" sz="820" dirty="0">
+                <a:solidFill>
+                  <a:srgbClr val="6B7280"/>
+                </a:solidFill>
+                <a:latin typeface="Calibri" pitchFamily="34" charset="0"/>
+                <a:ea typeface="Calibri" pitchFamily="34" charset="-122"/>
+                <a:cs typeface="Calibri" pitchFamily="34" charset="-120"/>
+              </a:rPr>
+              <a:t>Source: https://learn.microsoft.com/en-us/agent-framework/concepts/agents/conversations/compaction?tabs=python</a:t>
+            </a:r>
+            <a:endParaRPr lang="en-US" sz="820" dirty="0"/>
+          </a:p>
+        </p:txBody>
+      </p:sp>
+    </p:spTree>
+  </p:cSld>
+  <p:clrMapOvr>
+    <a:masterClrMapping/>
+  </p:clrMapOvr>
+</p:sld>
+</file>
+
+<file path=ppt/slides/slide8.xml><?xml version="1.0" encoding="utf-8"?>
+<p:sld xmlns:a="http://schemas.openxmlformats.org/drawingml/2006/main" xmlns:r="http://schemas.openxmlformats.org/officeDocument/2006/relationships" xmlns:p="http://schemas.openxmlformats.org/presentationml/2006/main">
+  <p:cSld name="Slide 8">
+    <p:bg>
+      <p:bgPr>
+        <a:solidFill>
+          <a:srgbClr val="FFFFFF"/>
+        </a:solidFill>
+      </p:bgPr>
+    </p:bg>
+    <p:spTree>
+      <p:nvGrpSpPr>
+        <p:cNvPr id="1" name=""/>
+        <p:cNvGrpSpPr/>
+        <p:nvPr/>
+      </p:nvGrpSpPr>
+      <p:grpSpPr>
+        <a:xfrm>
+          <a:off x="0" y="0"/>
+          <a:ext cx="0" cy="0"/>
+          <a:chOff x="0" y="0"/>
+          <a:chExt cx="0" cy="0"/>
+        </a:xfrm>
+      </p:grpSpPr>
+      <p:sp>
+        <p:nvSpPr>
+          <p:cNvPr id="2" name="Shape 0"/>
+          <p:cNvSpPr/>
+          <p:nvPr/>
+        </p:nvSpPr>
+        <p:spPr>
+          <a:xfrm>
+            <a:off x="0" y="0"/>
+            <a:ext cx="54864" cy="5143500"/>
+          </a:xfrm>
+          <a:prstGeom prst="rect">
+            <a:avLst/>
+          </a:prstGeom>
+          <a:solidFill>
+            <a:srgbClr val="1E2761"/>
+          </a:solidFill>
+          <a:ln/>
+        </p:spPr>
+      </p:sp>
+      <p:sp>
+        <p:nvSpPr>
+          <p:cNvPr id="3" name="Text 1"/>
+          <p:cNvSpPr/>
+          <p:nvPr/>
+        </p:nvSpPr>
+        <p:spPr>
+          <a:xfrm>
+            <a:off x="5486400" y="256032"/>
+            <a:ext cx="3337560" cy="228600"/>
+          </a:xfrm>
+          <a:prstGeom prst="rect">
+            <a:avLst/>
+          </a:prstGeom>
+          <a:noFill/>
+          <a:ln/>
+        </p:spPr>
+        <p:txBody>
+          <a:bodyPr wrap="square" lIns="0" tIns="0" rIns="0" bIns="0" rtlCol="0" anchor="ctr">
+            <a:normAutofit/>
+          </a:bodyPr>
+          <a:lstStyle/>
+          <a:p>
+            <a:pPr algn="r" indent="0" marL="0">
+              <a:buNone/>
+            </a:pPr>
+            <a:r>
+              <a:rPr lang="en-US" sz="950" dirty="0">
+                <a:solidFill>
+                  <a:srgbClr val="6B7280"/>
+                </a:solidFill>
+                <a:latin typeface="Calibri" pitchFamily="34" charset="0"/>
+                <a:ea typeface="Calibri" pitchFamily="34" charset="-122"/>
+                <a:cs typeface="Calibri" pitchFamily="34" charset="-120"/>
+              </a:rPr>
+              <a:t>Day 3 · Module 3 · EXPERIMENTAL</a:t>
+            </a:r>
+            <a:endParaRPr lang="en-US" sz="950" dirty="0"/>
+          </a:p>
+        </p:txBody>
+      </p:sp>
+      <p:sp>
+        <p:nvSpPr>
+          <p:cNvPr id="4" name="Text 2"/>
+          <p:cNvSpPr/>
+          <p:nvPr/>
+        </p:nvSpPr>
+        <p:spPr>
+          <a:xfrm>
+            <a:off x="365760" y="310896"/>
+            <a:ext cx="6583680" cy="603504"/>
+          </a:xfrm>
+          <a:prstGeom prst="rect">
+            <a:avLst/>
+          </a:prstGeom>
+          <a:noFill/>
+          <a:ln/>
+        </p:spPr>
+        <p:txBody>
+          <a:bodyPr wrap="square" lIns="0" tIns="0" rIns="0" bIns="0" rtlCol="0" anchor="ctr">
+            <a:normAutofit/>
+          </a:bodyPr>
+          <a:lstStyle/>
+          <a:p>
+            <a:pPr indent="0" marL="0">
+              <a:buNone/>
+            </a:pPr>
+            <a:r>
+              <a:rPr lang="en-US" sz="2800" b="1" dirty="0">
+                <a:solidFill>
+                  <a:srgbClr val="1E2761"/>
+                </a:solidFill>
+                <a:latin typeface="Calibri" pitchFamily="34" charset="0"/>
+                <a:ea typeface="Calibri" pitchFamily="34" charset="-122"/>
+                <a:cs typeface="Calibri" pitchFamily="34" charset="-120"/>
+              </a:rPr>
               <a:t>Measure what compaction changes</a:t>
             </a:r>
             <a:endParaRPr lang="en-US" sz="2800" dirty="0"/>
@@ -4630,7 +5073,7 @@
       </p:sp>
       <p:graphicFrame>
         <p:nvGraphicFramePr>
-          <p:cNvPr id="8" name="Table 0"/>
+          <p:cNvPr id="9" name="Table 0"/>
           <p:cNvGraphicFramePr>
             <a:graphicFrameLocks noGrp="1"/>
           </p:cNvGraphicFramePr>
@@ -5558,9 +6001,9 @@
 </p:sld>
 </file>
 
-<file path=ppt/slides/slide8.xml><?xml version="1.0" encoding="utf-8"?>
+<file path=ppt/slides/slide9.xml><?xml version="1.0" encoding="utf-8"?>
 <p:sld xmlns:a="http://schemas.openxmlformats.org/drawingml/2006/main" xmlns:r="http://schemas.openxmlformats.org/officeDocument/2006/relationships" xmlns:p="http://schemas.openxmlformats.org/presentationml/2006/main">
-  <p:cSld name="Slide 8">
+  <p:cSld name="Slide 9">
     <p:bg>
       <p:bgPr>
         <a:solidFill>

--- a/decks/day3/module-3-compaction.pptx
+++ b/decks/day3/module-3-compaction.pptx
@@ -3800,23 +3800,14 @@
             <a:r>
               <a:rPr lang="en-US" sz="1280" dirty="0">
                 <a:solidFill>
-                  <a:srgbClr val="212121"/>
+                  <a:srgbClr val="1E2761"/>
                 </a:solidFill>
                 <a:latin typeface="Consolas" pitchFamily="34" charset="0"/>
                 <a:ea typeface="Consolas" pitchFamily="34" charset="-122"/>
                 <a:cs typeface="Consolas" pitchFamily="34" charset="-120"/>
               </a:rPr>
-              <a:t>from agent_framework import SlidingWindowStrategy</a:t>
-            </a:r>
-            <a:endParaRPr lang="en-US" sz="1280" dirty="0"/>
-          </a:p>
-          <a:p>
-            <a:pPr indent="0" marL="0">
-              <a:buNone/>
-            </a:pPr>
-            <a:endParaRPr lang="en-US" sz="1280" dirty="0"/>
-          </a:p>
-          <a:p>
+              <a:t>from</a:t>
+            </a:r>
             <a:pPr indent="0" marL="0">
               <a:buNone/>
             </a:pPr>
@@ -3829,8 +3820,54 @@
                 <a:ea typeface="Consolas" pitchFamily="34" charset="-122"/>
                 <a:cs typeface="Consolas" pitchFamily="34" charset="-120"/>
               </a:rPr>
+              <a:t> agent_framework </a:t>
+            </a:r>
+            <a:pPr indent="0" marL="0">
+              <a:buNone/>
+            </a:pPr>
+            <a:r>
+              <a:rPr lang="en-US" sz="1280" dirty="0">
+                <a:solidFill>
+                  <a:srgbClr val="1E2761"/>
+                </a:solidFill>
+                <a:latin typeface="Consolas" pitchFamily="34" charset="0"/>
+                <a:ea typeface="Consolas" pitchFamily="34" charset="-122"/>
+                <a:cs typeface="Consolas" pitchFamily="34" charset="-120"/>
+              </a:rPr>
+              <a:t>import</a:t>
+            </a:r>
+            <a:pPr indent="0" marL="0">
+              <a:buNone/>
+            </a:pPr>
+            <a:r>
+              <a:rPr lang="en-US" sz="1280" dirty="0">
+                <a:solidFill>
+                  <a:srgbClr val="212121"/>
+                </a:solidFill>
+                <a:latin typeface="Consolas" pitchFamily="34" charset="0"/>
+                <a:ea typeface="Consolas" pitchFamily="34" charset="-122"/>
+                <a:cs typeface="Consolas" pitchFamily="34" charset="-120"/>
+              </a:rPr>
+              <a:t> SlidingWindowStrategy
+</a:t>
+            </a:r>
+            <a:pPr indent="0" marL="0">
+              <a:buNone/>
+            </a:pPr>
+            <a:r>
+              <a:rPr lang="en-US" sz="1280" i="1" dirty="0">
+                <a:solidFill>
+                  <a:srgbClr val="6B7280"/>
+                </a:solidFill>
+                <a:latin typeface="Consolas" pitchFamily="34" charset="0"/>
+                <a:ea typeface="Consolas" pitchFamily="34" charset="-122"/>
+                <a:cs typeface="Consolas" pitchFamily="34" charset="-120"/>
+              </a:rPr>
               <a:t># EXPERIMENTAL: keep the newest 20 non-system groups.</a:t>
             </a:r>
+            <a:pPr indent="0" marL="0">
+              <a:buNone/>
+            </a:pPr>
             <a:endParaRPr lang="en-US" sz="1280" dirty="0"/>
           </a:p>
           <a:p>

--- a/decks/day3/module-3-compaction.pptx
+++ b/decks/day3/module-3-compaction.pptx
@@ -3763,11 +3763,11 @@
             <a:avLst/>
           </a:prstGeom>
           <a:solidFill>
-            <a:srgbClr val="F3F4F6"/>
+            <a:srgbClr val="1D1E22"/>
           </a:solidFill>
-          <a:ln w="6350">
+          <a:ln w="9525">
             <a:solidFill>
-              <a:srgbClr val="D1D5DB"/>
+              <a:srgbClr val="2A2B2E"/>
             </a:solidFill>
             <a:prstDash val="solid"/>
           </a:ln>
@@ -3800,7 +3800,7 @@
             <a:r>
               <a:rPr lang="en-US" sz="1280" dirty="0">
                 <a:solidFill>
-                  <a:srgbClr val="1E2761"/>
+                  <a:srgbClr val="A996B6"/>
                 </a:solidFill>
                 <a:latin typeface="Consolas" pitchFamily="34" charset="0"/>
                 <a:ea typeface="Consolas" pitchFamily="34" charset="-122"/>
@@ -3814,7 +3814,7 @@
             <a:r>
               <a:rPr lang="en-US" sz="1280" dirty="0">
                 <a:solidFill>
-                  <a:srgbClr val="212121"/>
+                  <a:srgbClr val="FFFFFF"/>
                 </a:solidFill>
                 <a:latin typeface="Consolas" pitchFamily="34" charset="0"/>
                 <a:ea typeface="Consolas" pitchFamily="34" charset="-122"/>
@@ -3828,7 +3828,7 @@
             <a:r>
               <a:rPr lang="en-US" sz="1280" dirty="0">
                 <a:solidFill>
-                  <a:srgbClr val="1E2761"/>
+                  <a:srgbClr val="A996B6"/>
                 </a:solidFill>
                 <a:latin typeface="Consolas" pitchFamily="34" charset="0"/>
                 <a:ea typeface="Consolas" pitchFamily="34" charset="-122"/>
@@ -3842,7 +3842,7 @@
             <a:r>
               <a:rPr lang="en-US" sz="1280" dirty="0">
                 <a:solidFill>
-                  <a:srgbClr val="212121"/>
+                  <a:srgbClr val="FFFFFF"/>
                 </a:solidFill>
                 <a:latin typeface="Consolas" pitchFamily="34" charset="0"/>
                 <a:ea typeface="Consolas" pitchFamily="34" charset="-122"/>
@@ -3857,7 +3857,7 @@
             <a:r>
               <a:rPr lang="en-US" sz="1280" i="1" dirty="0">
                 <a:solidFill>
-                  <a:srgbClr val="6B7280"/>
+                  <a:srgbClr val="666666"/>
                 </a:solidFill>
                 <a:latin typeface="Consolas" pitchFamily="34" charset="0"/>
                 <a:ea typeface="Consolas" pitchFamily="34" charset="-122"/>
@@ -3877,7 +3877,7 @@
             <a:r>
               <a:rPr lang="en-US" sz="1280" dirty="0">
                 <a:solidFill>
-                  <a:srgbClr val="212121"/>
+                  <a:srgbClr val="FFFFFF"/>
                 </a:solidFill>
                 <a:latin typeface="Consolas" pitchFamily="34" charset="0"/>
                 <a:ea typeface="Consolas" pitchFamily="34" charset="-122"/>
@@ -3894,7 +3894,7 @@
             <a:r>
               <a:rPr lang="en-US" sz="1280" dirty="0">
                 <a:solidFill>
-                  <a:srgbClr val="212121"/>
+                  <a:srgbClr val="FFFFFF"/>
                 </a:solidFill>
                 <a:latin typeface="Consolas" pitchFamily="34" charset="0"/>
                 <a:ea typeface="Consolas" pitchFamily="34" charset="-122"/>
@@ -3911,7 +3911,7 @@
             <a:r>
               <a:rPr lang="en-US" sz="1280" dirty="0">
                 <a:solidFill>
-                  <a:srgbClr val="212121"/>
+                  <a:srgbClr val="FFFFFF"/>
                 </a:solidFill>
                 <a:latin typeface="Consolas" pitchFamily="34" charset="0"/>
                 <a:ea typeface="Consolas" pitchFamily="34" charset="-122"/>

--- a/decks/day3/module-3-compaction.pptx
+++ b/decks/day3/module-3-compaction.pptx
@@ -2153,8 +2153,8 @@
             <a:tbl>
               <a:tblPr/>
               <a:tblGrid>
-                <a:gridCol w="4206240"/>
-                <a:gridCol w="4206240"/>
+                <a:gridCol w="2206552"/>
+                <a:gridCol w="6205928"/>
               </a:tblGrid>
               <a:tr h="586740">
                 <a:tc>
@@ -4691,11 +4691,11 @@
             <a:tbl>
               <a:tblPr/>
               <a:tblGrid>
-                <a:gridCol w="1682496"/>
-                <a:gridCol w="1682496"/>
-                <a:gridCol w="1682496"/>
-                <a:gridCol w="1682496"/>
-                <a:gridCol w="1682496"/>
+                <a:gridCol w="1389647"/>
+                <a:gridCol w="1188720"/>
+                <a:gridCol w="2024915"/>
+                <a:gridCol w="1188720"/>
+                <a:gridCol w="2620478"/>
               </a:tblGrid>
               <a:tr h="502920">
                 <a:tc>

--- a/decks/day3/module-3-compaction.pptx
+++ b/decks/day3/module-3-compaction.pptx
@@ -9226,7 +9226,7 @@
         <p:spPr>
           <a:xfrm>
             <a:off x="512064" y="1197864"/>
-            <a:ext cx="3813048" cy="310896"/>
+            <a:ext cx="3813048" cy="311277"/>
           </a:xfrm>
           <a:prstGeom prst="rect">
             <a:avLst/>
@@ -9235,7 +9235,7 @@
           <a:ln/>
         </p:spPr>
         <p:txBody>
-          <a:bodyPr wrap="square" lIns="0" tIns="0" rIns="0" bIns="0" rtlCol="0" anchor="ctr">
+          <a:bodyPr wrap="square" lIns="0" tIns="0" rIns="0" bIns="0" rtlCol="0" anchor="t">
             <a:normAutofit/>
           </a:bodyPr>
           <a:lstStyle/>
@@ -9266,8 +9266,8 @@
         </p:nvSpPr>
         <p:spPr>
           <a:xfrm>
-            <a:off x="512064" y="1581912"/>
-            <a:ext cx="3813048" cy="1033272"/>
+            <a:off x="512064" y="1564005"/>
+            <a:ext cx="3813048" cy="1078611"/>
           </a:xfrm>
           <a:prstGeom prst="rect">
             <a:avLst/>
@@ -9335,7 +9335,7 @@
         <p:spPr>
           <a:xfrm>
             <a:off x="4818888" y="1197864"/>
-            <a:ext cx="3813048" cy="310896"/>
+            <a:ext cx="3813048" cy="311277"/>
           </a:xfrm>
           <a:prstGeom prst="rect">
             <a:avLst/>
@@ -9344,7 +9344,7 @@
           <a:ln/>
         </p:spPr>
         <p:txBody>
-          <a:bodyPr wrap="square" lIns="0" tIns="0" rIns="0" bIns="0" rtlCol="0" anchor="ctr">
+          <a:bodyPr wrap="square" lIns="0" tIns="0" rIns="0" bIns="0" rtlCol="0" anchor="t">
             <a:normAutofit/>
           </a:bodyPr>
           <a:lstStyle/>
@@ -9375,8 +9375,8 @@
         </p:nvSpPr>
         <p:spPr>
           <a:xfrm>
-            <a:off x="4818888" y="1581912"/>
-            <a:ext cx="3813048" cy="1033272"/>
+            <a:off x="4818888" y="1564005"/>
+            <a:ext cx="3813048" cy="1078611"/>
           </a:xfrm>
           <a:prstGeom prst="rect">
             <a:avLst/>
@@ -9444,7 +9444,7 @@
         <p:spPr>
           <a:xfrm>
             <a:off x="512064" y="3054096"/>
-            <a:ext cx="3813048" cy="310896"/>
+            <a:ext cx="3813048" cy="311277"/>
           </a:xfrm>
           <a:prstGeom prst="rect">
             <a:avLst/>
@@ -9453,7 +9453,7 @@
           <a:ln/>
         </p:spPr>
         <p:txBody>
-          <a:bodyPr wrap="square" lIns="0" tIns="0" rIns="0" bIns="0" rtlCol="0" anchor="ctr">
+          <a:bodyPr wrap="square" lIns="0" tIns="0" rIns="0" bIns="0" rtlCol="0" anchor="t">
             <a:normAutofit/>
           </a:bodyPr>
           <a:lstStyle/>
@@ -9484,8 +9484,8 @@
         </p:nvSpPr>
         <p:spPr>
           <a:xfrm>
-            <a:off x="512064" y="3438144"/>
-            <a:ext cx="3813048" cy="1033272"/>
+            <a:off x="512064" y="3420237"/>
+            <a:ext cx="3813048" cy="1078611"/>
           </a:xfrm>
           <a:prstGeom prst="rect">
             <a:avLst/>
@@ -9553,7 +9553,7 @@
         <p:spPr>
           <a:xfrm>
             <a:off x="4818888" y="3054096"/>
-            <a:ext cx="3813048" cy="310896"/>
+            <a:ext cx="3813048" cy="311277"/>
           </a:xfrm>
           <a:prstGeom prst="rect">
             <a:avLst/>
@@ -9562,7 +9562,7 @@
           <a:ln/>
         </p:spPr>
         <p:txBody>
-          <a:bodyPr wrap="square" lIns="0" tIns="0" rIns="0" bIns="0" rtlCol="0" anchor="ctr">
+          <a:bodyPr wrap="square" lIns="0" tIns="0" rIns="0" bIns="0" rtlCol="0" anchor="t">
             <a:normAutofit/>
           </a:bodyPr>
           <a:lstStyle/>
@@ -9593,8 +9593,8 @@
         </p:nvSpPr>
         <p:spPr>
           <a:xfrm>
-            <a:off x="4818888" y="3438144"/>
-            <a:ext cx="3813048" cy="1033272"/>
+            <a:off x="4818888" y="3420237"/>
+            <a:ext cx="3813048" cy="1078611"/>
           </a:xfrm>
           <a:prstGeom prst="rect">
             <a:avLst/>
